--- a/lecons/LSA/Climatology/LSA_CLIM_L07_Geographical_Factors_Affecting_Temperature.pptx
+++ b/lecons/LSA/Climatology/LSA_CLIM_L07_Geographical_Factors_Affecting_Temperature.pptx
@@ -3022,7 +3022,7 @@
           <a:p>
             <a:r>
               <a:rPr lang="en-US" dirty="0"/>
-              <a:t>Let us copy DEFINITIONS. The key terms of this lesson are defined as follows. Write each point on a new line, with the key term first. When you finish, we go to the next slide.</a:t>
+              <a:t>Let us copy the definitions. The key terms of this lesson are defined as follows. On this slide we have Adret and Ubac. Write each point on a new line, with the key term first, and explain it in your own words when we revise. When you finish, we go to the next slide.</a:t>
             </a:r>
             <a:endParaRPr lang="en-US" dirty="0"/>
           </a:p>
@@ -3110,7 +3110,7 @@
           <a:p>
             <a:r>
               <a:rPr lang="en-US" dirty="0"/>
-              <a:t>We continue with the same part. Write each point on a new line, with the key term first.</a:t>
+              <a:t>We continue with the definitions. On this slide we have Heat island and Temperature lapsing. Write each point on a new line, with the key term first, and explain it in your own words when we revise.</a:t>
             </a:r>
             <a:endParaRPr lang="en-US" dirty="0"/>
           </a:p>
@@ -3198,7 +3198,7 @@
           <a:p>
             <a:r>
               <a:rPr lang="en-US" dirty="0"/>
-              <a:t>Let us copy Nature of Surface and Distance from the Sea. Land and water heat and cool differently. Write each point on a new line, with the key term first. When you finish, we go to the next slide.</a:t>
+              <a:t>Let us copy Nature of Surface and Distance from the Sea. Land and water heat and cool differently. On this slide we have Land and water. Write each point on a new line, with the key term first, and explain it in your own words when we revise. When you finish, we go to the next slide.</a:t>
             </a:r>
             <a:endParaRPr lang="en-US" dirty="0"/>
           </a:p>
@@ -3286,7 +3286,7 @@
           <a:p>
             <a:r>
               <a:rPr lang="en-US" dirty="0"/>
-              <a:t>We continue with the same part. Write each point on a new line, with the key term first.</a:t>
+              <a:t>We continue with Nature of Surface and Distance from the Sea. On this slide we have Distance from the sea. Write each point on a new line, with the key term first, and explain it in your own words when we revise.</a:t>
             </a:r>
             <a:endParaRPr lang="en-US" dirty="0"/>
           </a:p>
@@ -3550,7 +3550,7 @@
           <a:p>
             <a:r>
               <a:rPr lang="en-US" dirty="0"/>
-              <a:t>Let us copy Relief. Relief affects temperature in two ways. Write each point on a new line, with the key term first. When you finish, we go to the next slide.</a:t>
+              <a:t>Let us copy Relief. Relief affects temperature in two ways. On this slide we have Altitude. Write each point on a new line, with the key term first, and explain it in your own words when we revise. When you finish, we go to the next slide.</a:t>
             </a:r>
             <a:endParaRPr lang="en-US" dirty="0"/>
           </a:p>
@@ -3638,7 +3638,7 @@
           <a:p>
             <a:r>
               <a:rPr lang="en-US" dirty="0"/>
-              <a:t>We continue with the same part. Write each point on a new line, with the key term first.</a:t>
+              <a:t>We continue with Relief. On this slide we have Aspect of slope. Write each point on a new line, with the key term first, and explain it in your own words when we revise.</a:t>
             </a:r>
             <a:endParaRPr lang="en-US" dirty="0"/>
           </a:p>
@@ -3814,7 +3814,7 @@
           <a:p>
             <a:r>
               <a:rPr lang="en-US" dirty="0"/>
-              <a:t>Let us copy Currents, Winds, Clouds and Towns. Other geographical factors include. Write each point on a new line, with the key term first. When you finish, we go to the next slide.</a:t>
+              <a:t>Let us copy Currents, Winds, Clouds and Towns. Other geographical factors include. On this slide we have Ocean currents and winds. Write each point on a new line, with the key term first, and explain it in your own words when we revise. When you finish, we go to the next slide.</a:t>
             </a:r>
             <a:endParaRPr lang="en-US" dirty="0"/>
           </a:p>
@@ -3902,7 +3902,7 @@
           <a:p>
             <a:r>
               <a:rPr lang="en-US" dirty="0"/>
-              <a:t>We continue with the same part. Write each point on a new line, with the key term first. When you finish, we go to the next slide.</a:t>
+              <a:t>We continue with Currents, Winds, Clouds and Towns. On this slide we have Cloud cover. Write each point on a new line, with the key term first, and explain it in your own words when we revise. When you finish, we go to the next slide.</a:t>
             </a:r>
             <a:endParaRPr lang="en-US" dirty="0"/>
           </a:p>
@@ -3990,7 +3990,7 @@
           <a:p>
             <a:r>
               <a:rPr lang="en-US" dirty="0"/>
-              <a:t>We continue with the same part. Write each point on a new line, with the key term first.</a:t>
+              <a:t>We continue with Currents, Winds, Clouds and Towns. On this slide we have Urbanisation. Write each point on a new line, with the key term first, and explain it in your own words when we revise.</a:t>
             </a:r>
             <a:endParaRPr lang="en-US" dirty="0"/>
           </a:p>
@@ -5222,7 +5222,7 @@
           <a:p>
             <a:r>
               <a:rPr lang="en-US" dirty="0"/>
-              <a:t>Here is the plan of our lesson today. We shall correction of the homework; then objectives and recall; then real-life situation and action to take; then learning activities; then board summary; then evaluation, remediation and homework.</a:t>
+              <a:t>Here is the plan of our lesson today. First, we shall correct the homework. Then we shall look at the objectives and recall what you already know. After that, we shall study a situation from real life and the action to take, and do the learning activities. Finally, we shall copy the board summary, do the evaluation and the remediation, and I will give you the homework.</a:t>
             </a:r>
             <a:endParaRPr lang="en-US" dirty="0"/>
           </a:p>
@@ -6762,7 +6762,7 @@
                 <a:ea typeface="Times New Roman" pitchFamily="34" charset="-122"/>
                 <a:cs typeface="Times New Roman" pitchFamily="34" charset="-120"/>
               </a:rPr>
-              <a:t>Lesson 7: Geographical Factors Affecting Temperature</a:t>
+              <a:t>Lesson 7</a:t>
             </a:r>
             <a:endParaRPr lang="en-US" sz="2600" dirty="0"/>
           </a:p>
